--- a/figures/main/fig6_architecture_source.pptx
+++ b/figures/main/fig6_architecture_source.pptx
@@ -484,7 +484,7 @@
       </p:sp>
       <p:sp>
         <p:nvSpPr>
-          <p:cNvPr id="10" name="Patch MLP"/>
+          <p:cNvPr id="10" name="CNN"/>
           <p:cNvSpPr/>
           <p:nvPr/>
         </p:nvSpPr>
@@ -525,7 +525,7 @@
                 <a:ea typeface="Arial"/>
                 <a:cs typeface="Arial"/>
               </a:rPr>
-              <a:t>Patch MLP</a:t>
+              <a:t>CNN</a:t>
             </a:r>
             <a:endParaRPr lang="en-US" sz="1200" b="1" dirty="0"/>
           </a:p>
@@ -640,7 +640,7 @@
       </p:cxnSp>
       <p:cxnSp>
         <p:nvCxnSpPr>
-          <p:cNvPr id="14" name="HSR to Patch MLP segment 1"/>
+          <p:cNvPr id="14" name="HSR to CNN segment 1"/>
           <p:cNvCxnSpPr>
             <a:cxnSpLocks/>
             <a:stCxn id="9" idx="3"/>
@@ -668,7 +668,7 @@
       </p:cxnSp>
       <p:cxnSp>
         <p:nvCxnSpPr>
-          <p:cNvPr id="15" name="Patch MLP to RN60 segment 1"/>
+          <p:cNvPr id="15" name="CNN to RN60 segment 1"/>
           <p:cNvCxnSpPr>
             <a:cxnSpLocks/>
             <a:stCxn id="10" idx="3"/>
